--- a/projects/selective_interference/notes/2026_01_15.pptx
+++ b/projects/selective_interference/notes/2026_01_15.pptx
@@ -4308,7 +4308,7 @@
             <a:fld id="{241EB5C9-1307-BA42-ABA2-0BC069CD8E7F}" type="datetimeFigureOut">
               <a:rPr lang="en-US" smtClean="0"/>
               <a:pPr/>
-              <a:t>1/15/26</a:t>
+              <a:t>2/10/26</a:t>
             </a:fld>
             <a:endParaRPr lang="en-US" dirty="0"/>
           </a:p>
@@ -4501,7 +4501,7 @@
           <a:p>
             <a:fld id="{241EB5C9-1307-BA42-ABA2-0BC069CD8E7F}" type="datetimeFigureOut">
               <a:rPr lang="en-US" smtClean="0"/>
-              <a:t>1/15/26</a:t>
+              <a:t>2/10/26</a:t>
             </a:fld>
             <a:endParaRPr lang="en-US" dirty="0"/>
           </a:p>
@@ -4748,7 +4748,7 @@
           <a:p>
             <a:fld id="{241EB5C9-1307-BA42-ABA2-0BC069CD8E7F}" type="datetimeFigureOut">
               <a:rPr lang="en-US" smtClean="0"/>
-              <a:t>1/15/26</a:t>
+              <a:t>2/10/26</a:t>
             </a:fld>
             <a:endParaRPr lang="en-US" dirty="0"/>
           </a:p>
@@ -5041,7 +5041,7 @@
           <a:p>
             <a:fld id="{241EB5C9-1307-BA42-ABA2-0BC069CD8E7F}" type="datetimeFigureOut">
               <a:rPr lang="en-US" smtClean="0"/>
-              <a:t>1/15/26</a:t>
+              <a:t>2/10/26</a:t>
             </a:fld>
             <a:endParaRPr lang="en-US" dirty="0"/>
           </a:p>
@@ -5464,7 +5464,7 @@
           <a:p>
             <a:fld id="{241EB5C9-1307-BA42-ABA2-0BC069CD8E7F}" type="datetimeFigureOut">
               <a:rPr lang="en-US" smtClean="0"/>
-              <a:t>1/15/26</a:t>
+              <a:t>2/10/26</a:t>
             </a:fld>
             <a:endParaRPr lang="en-US" dirty="0"/>
           </a:p>
@@ -5589,7 +5589,7 @@
           <a:p>
             <a:fld id="{241EB5C9-1307-BA42-ABA2-0BC069CD8E7F}" type="datetimeFigureOut">
               <a:rPr lang="en-US" smtClean="0"/>
-              <a:t>1/15/26</a:t>
+              <a:t>2/10/26</a:t>
             </a:fld>
             <a:endParaRPr lang="en-US" dirty="0"/>
           </a:p>
@@ -5684,7 +5684,7 @@
           <a:p>
             <a:fld id="{241EB5C9-1307-BA42-ABA2-0BC069CD8E7F}" type="datetimeFigureOut">
               <a:rPr lang="en-US" smtClean="0"/>
-              <a:t>1/15/26</a:t>
+              <a:t>2/10/26</a:t>
             </a:fld>
             <a:endParaRPr lang="en-US" dirty="0"/>
           </a:p>
@@ -5959,7 +5959,7 @@
           <a:p>
             <a:fld id="{241EB5C9-1307-BA42-ABA2-0BC069CD8E7F}" type="datetimeFigureOut">
               <a:rPr lang="en-US" smtClean="0"/>
-              <a:t>1/15/26</a:t>
+              <a:t>2/10/26</a:t>
             </a:fld>
             <a:endParaRPr lang="en-US" dirty="0"/>
           </a:p>
@@ -6352,7 +6352,7 @@
           <a:p>
             <a:fld id="{241EB5C9-1307-BA42-ABA2-0BC069CD8E7F}" type="datetimeFigureOut">
               <a:rPr lang="en-US" smtClean="0"/>
-              <a:t>1/15/26</a:t>
+              <a:t>2/10/26</a:t>
             </a:fld>
             <a:endParaRPr lang="en-US" dirty="0"/>
           </a:p>
@@ -6520,7 +6520,7 @@
           <a:p>
             <a:fld id="{241EB5C9-1307-BA42-ABA2-0BC069CD8E7F}" type="datetimeFigureOut">
               <a:rPr lang="en-US" smtClean="0"/>
-              <a:t>1/15/26</a:t>
+              <a:t>2/10/26</a:t>
             </a:fld>
             <a:endParaRPr lang="en-US" dirty="0"/>
           </a:p>
@@ -6698,7 +6698,7 @@
           <a:p>
             <a:fld id="{241EB5C9-1307-BA42-ABA2-0BC069CD8E7F}" type="datetimeFigureOut">
               <a:rPr lang="en-US" smtClean="0"/>
-              <a:t>1/15/26</a:t>
+              <a:t>2/10/26</a:t>
             </a:fld>
             <a:endParaRPr lang="en-US" dirty="0"/>
           </a:p>
@@ -9036,7 +9036,7 @@
           <a:p>
             <a:fld id="{241EB5C9-1307-BA42-ABA2-0BC069CD8E7F}" type="datetimeFigureOut">
               <a:rPr lang="en-US" smtClean="0"/>
-              <a:t>1/15/26</a:t>
+              <a:t>2/10/26</a:t>
             </a:fld>
             <a:endParaRPr lang="en-US" dirty="0"/>
           </a:p>
